--- a/deliverables/C_Compass_Deck.pptx
+++ b/deliverables/C_Compass_Deck.pptx
@@ -1305,7 +1305,7 @@
           <a:p>
             <a:r>
               <a:rPr lang="en-US" dirty="0"/>
-              <a:t>The reason to trust the design is that it's built and tested. It runs as one URL — the web app, the API and the login together — and every answer goes through the real server-side permission filter; the persona switch in the demo is a real sign-in. Twelve gold Q&amp;A cases with a permission-leak test, run in memory and through a SQL WHERE clause, plus twelve more against a synthetic five-year corpus built from public research on the Foundation. A red-team suite with fifteen planted injection documents. Around a hundred and thirty unit tests. Real OIDC, a tamper-evident audit log, rate limits, a kill switch. All of it in a ten-step promotion gate where a leak is a hard stop.</a:t>
+              <a:t>The reason to trust the design is that it's built and tested. It's running at a live URL you can open right now, and every answer goes through the real server-side permission filter; the persona switch in the demo is a real sign-in. Forty-six gold Q&amp;A cases with a permission-leak test, run in memory and through a SQL WHERE clause, plus twenty-five more against a synthetic five-year corpus built from public research on the Foundation. A red-team suite with fifteen planted injection documents, seventeen adversarial cases. A hundred and twenty-six unit tests. Real OIDC, a tamper-evident audit log, rate limits, a kill switch. All of it in a promotion gate where a leak is a hard stop, and the hosted demo redeploys on every green push.</a:t>
             </a:r>
             <a:endParaRPr lang="en-US" dirty="0"/>
           </a:p>
@@ -2020,8 +2020,8 @@
         </p:nvSpPr>
         <p:spPr>
           <a:xfrm>
-            <a:off x="822960" y="5074920"/>
-            <a:ext cx="8229600" cy="914400"/>
+            <a:off x="822960" y="4937760"/>
+            <a:ext cx="8229600" cy="1097280"/>
           </a:xfrm>
           <a:prstGeom prst="rect">
             <a:avLst/>
@@ -2075,6 +2075,35 @@
                 <a:cs typeface="Arial" pitchFamily="34" charset="-120"/>
               </a:rPr>
               <a:t>Jessenia Cintron</a:t>
+            </a:r>
+            <a:endParaRPr lang="en-US" sz="1400" dirty="0"/>
+          </a:p>
+          <a:p>
+            <a:pPr indent="0" marL="0">
+              <a:lnSpc>
+                <a:spcPct val="135000"/>
+              </a:lnSpc>
+              <a:buNone/>
+            </a:pPr>
+            <a:endParaRPr lang="en-US" sz="1400" dirty="0"/>
+          </a:p>
+          <a:p>
+            <a:pPr indent="0" marL="0">
+              <a:lnSpc>
+                <a:spcPct val="135000"/>
+              </a:lnSpc>
+              <a:buNone/>
+            </a:pPr>
+            <a:r>
+              <a:rPr lang="en-US" sz="1400" dirty="0">
+                <a:solidFill>
+                  <a:srgbClr val="F0C7B8"/>
+                </a:solidFill>
+                <a:latin typeface="Arial" pitchFamily="34" charset="0"/>
+                <a:ea typeface="Arial" pitchFamily="34" charset="-122"/>
+                <a:cs typeface="Arial" pitchFamily="34" charset="-120"/>
+              </a:rPr>
+              <a:t>Live demo: compass-demo-gwk4.onrender.com</a:t>
             </a:r>
             <a:endParaRPr lang="en-US" sz="1400" dirty="0"/>
           </a:p>
@@ -3854,7 +3883,7 @@
                 <a:ea typeface="Arial" pitchFamily="34" charset="-122"/>
                 <a:cs typeface="Arial" pitchFamily="34" charset="-120"/>
               </a:rPr>
-              <a:t>Jessenia Cintron  ·  Compass  ·  strategy doc · discovery guide · security review + OWASP controls matrix · cost model · pen-test scope · deploy checklist · data-owner sign-off · running codebase (npm run ci · npm run demo)</a:t>
+              <a:t>Jessenia Cintron  ·  Compass  ·  strategy doc · discovery guide · security review + OWASP controls matrix · cost model · pen-test scope · deploy checklist · data-owner sign-off · running codebase (npm run ci) · live demo at compass-demo-gwk4.onrender.com</a:t>
             </a:r>
             <a:endParaRPr lang="en-US" sz="850" dirty="0"/>
           </a:p>
@@ -6377,7 +6406,7 @@
                 <a:ea typeface="Arial" pitchFamily="34" charset="-122"/>
                 <a:cs typeface="Arial" pitchFamily="34" charset="-120"/>
               </a:rPr>
-              <a:t>A gold Q&amp;A set + a 16-case adversarial suite + ~130 unit tests + a dependency-advisory check gate every release (npm run ci). Feedback feeds the gold set. Better at retrieving and citing — never at deciding.</a:t>
+              <a:t>A 46-case gold set + a 17-case adversarial suite + 126 unit tests + a dependency-advisory check gate every release (npm run ci). Feedback feeds the gold set. Better at retrieving and citing — never at deciding.</a:t>
             </a:r>
             <a:endParaRPr lang="en-US" sz="1050" dirty="0"/>
           </a:p>
@@ -7603,7 +7632,7 @@
                 <a:ea typeface="Courier New" pitchFamily="34" charset="-122"/>
                 <a:cs typeface="Courier New" pitchFamily="34" charset="-120"/>
               </a:rPr>
-              <a:t>npm run demo</a:t>
+              <a:t>live demo + npm run demo</a:t>
             </a:r>
             <a:endParaRPr lang="en-US" sz="900" dirty="0"/>
           </a:p>
@@ -7645,7 +7674,7 @@
                 <a:ea typeface="Arial" pitchFamily="34" charset="-122"/>
                 <a:cs typeface="Arial" pitchFamily="34" charset="-120"/>
               </a:rPr>
-              <a:t>One URL: the web app, the API and the login on one origin. Every answer goes through the server-side permission filter — the demo persona switch is a real sign-in, not a UI toggle. Flip from Program Officer to Comms and watch the same question drop from 8 sources to 5.</a:t>
+              <a:t>One URL: the web app, the API and the login on one origin (hosted, and local). Every answer goes through the server-side permission filter — the demo persona switch is a real sign-in, not a UI toggle. Flip from Program Officer to Comms and watch the same question drop from 8 sources to 5. Click a citation and the source record opens with the passage highlighted — permission re-checked there too.</a:t>
             </a:r>
             <a:endParaRPr lang="en-US" sz="870" dirty="0"/>
           </a:p>
@@ -7729,7 +7758,7 @@
                 <a:ea typeface="Arial" pitchFamily="34" charset="-122"/>
                 <a:cs typeface="Arial" pitchFamily="34" charset="-120"/>
               </a:rPr>
-              <a:t>12 gold Q&amp;A cases run in memory and through a SQL WHERE clause; 12 more against a synthetic 5-year corpus (~65 grants, ~110 declined applicants, ~260 docs) with template drift, a migration boundary, conflicting figures, Spanish reports. 0 permission leaks.</a:t>
+              <a:t>46 gold Q&amp;A cases run in memory and through a SQL WHERE clause; 25 more against a synthetic 5-year corpus (~59 grants, ~110 declined applicants, ~260 docs) with template drift, a migration boundary, conflicting figures, Spanish reports. 0 permission leaks.</a:t>
             </a:r>
             <a:endParaRPr lang="en-US" sz="870" dirty="0"/>
           </a:p>
@@ -7771,7 +7800,7 @@
                 <a:ea typeface="Courier New" pitchFamily="34" charset="-122"/>
                 <a:cs typeface="Courier New" pitchFamily="34" charset="-120"/>
               </a:rPr>
-              <a:t>npm run redteam</a:t>
+              <a:t>npm run redteam · eval:metrics</a:t>
             </a:r>
             <a:endParaRPr lang="en-US" sz="900" dirty="0"/>
           </a:p>
@@ -7813,7 +7842,7 @@
                 <a:ea typeface="Arial" pitchFamily="34" charset="-122"/>
                 <a:cs typeface="Arial" pitchFamily="34" charset="-120"/>
               </a:rPr>
-              <a:t>15 planted prompt-injection documents in the index + jailbreak, exfiltration, permission-probing, PII-extraction. 16/16, 0 leaks. “Print your system prompt” is refused.</a:t>
+              <a:t>15 planted prompt-injection documents + jailbreak, exfiltration, permission-probing, PII- and legal-privilege-probing. 17/17, 0 leaks. Separately, an optional cross-encoder reranker lifts recall@1 from 0.10 to 0.70 on the 5-year corpus — measured, not claimed.</a:t>
             </a:r>
             <a:endParaRPr lang="en-US" sz="870" dirty="0"/>
           </a:p>
@@ -7897,7 +7926,7 @@
                 <a:ea typeface="Arial" pitchFamily="34" charset="-122"/>
                 <a:cs typeface="Arial" pitchFamily="34" charset="-120"/>
               </a:rPr>
-              <a:t>~130 unit tests (~97% line coverage on the logic modules); RS256 OIDC verification, fail-closed on a failed group lookup, a hash-chained audit log, the full Google login flow, rate limits, a kill switch, session revocation — 17/17.</a:t>
+              <a:t>126 unit tests (~97% line coverage on the logic modules); RS256 OIDC verification, fail-closed on a failed group lookup, a hash-chained audit log, the full Google login flow, rate limits, a kill switch, session revocation — 20/20.</a:t>
             </a:r>
             <a:endParaRPr lang="en-US" sz="870" dirty="0"/>
           </a:p>
@@ -7981,7 +8010,7 @@
                 <a:ea typeface="Arial" pitchFamily="34" charset="-122"/>
                 <a:cs typeface="Arial" pitchFamily="34" charset="-120"/>
               </a:rPr>
-              <a:t>All of the above + a dependency-advisory check, in one 10-step promotion gate. A permission-leak finding or a red-team regression is a hard stop. GitHub Actions + Dependabot config included.</a:t>
+              <a:t>All of the above + a dependency-advisory check, in one promotion gate. A permission-leak finding or a red-team regression is a hard stop. GitHub Actions + Dependabot config included; the hosted demo redeploys on every green push to main.</a:t>
             </a:r>
             <a:endParaRPr lang="en-US" sz="870" dirty="0"/>
           </a:p>

--- a/deliverables/C_Compass_Deck.pptx
+++ b/deliverables/C_Compass_Deck.pptx
@@ -6406,7 +6406,7 @@
                 <a:ea typeface="Arial" pitchFamily="34" charset="-122"/>
                 <a:cs typeface="Arial" pitchFamily="34" charset="-120"/>
               </a:rPr>
-              <a:t>A 46-case gold set + a 17-case adversarial suite + 126 unit tests + a dependency-advisory check gate every release (npm run ci). Feedback feeds the gold set. Better at retrieving and citing — never at deciding.</a:t>
+              <a:t>A 46-case gold set + a 17-case adversarial suite + 166 unit tests + a dependency-advisory check gate every release (npm run ci). Feedback feeds the gold set. Better at retrieving and citing — never at deciding.</a:t>
             </a:r>
             <a:endParaRPr lang="en-US" sz="1050" dirty="0"/>
           </a:p>
@@ -7926,7 +7926,7 @@
                 <a:ea typeface="Arial" pitchFamily="34" charset="-122"/>
                 <a:cs typeface="Arial" pitchFamily="34" charset="-120"/>
               </a:rPr>
-              <a:t>126 unit tests (~97% line coverage on the logic modules); RS256 OIDC verification, fail-closed on a failed group lookup, a hash-chained audit log, the full Google login flow, rate limits, a kill switch, session revocation — 20/20.</a:t>
+              <a:t>166 unit tests (~96% line coverage); RS256 OIDC verification, fail-closed on a failed group lookup, a hash-chained audit log, the full Google login flow, rate limits, a kill switch, session revocation — 20/20.</a:t>
             </a:r>
             <a:endParaRPr lang="en-US" sz="870" dirty="0"/>
           </a:p>
